--- a/37 - Seminar - IPR.pptx
+++ b/37 - Seminar - IPR.pptx
@@ -8985,7 +8985,7 @@
         </p:spPr>
         <p:txBody>
           <a:bodyPr vert="horz" lIns="91416" tIns="45708" rIns="91416" bIns="45708" rtlCol="0" anchor="ctr">
-            <a:normAutofit fontScale="92500" lnSpcReduction="20000"/>
+            <a:normAutofit/>
           </a:bodyPr>
           <a:lstStyle/>
           <a:p>
@@ -9028,7 +9028,7 @@
             </a:pPr>
             <a:r>
               <a:rPr lang="en-US" b="1" dirty="0"/>
-              <a:t>The Role of Intermediaries in Protecting Privacy</a:t>
+              <a:t>Procedural Aspects &amp; Enforcement Mechanisms</a:t>
             </a:r>
             <a:endParaRPr lang="en-US" dirty="0"/>
           </a:p>
@@ -9039,7 +9039,7 @@
             </a:pPr>
             <a:r>
               <a:rPr lang="en-US" b="1" dirty="0"/>
-              <a:t>Procedural Aspects &amp; Enforcement Mechanisms</a:t>
+              <a:t>Corporate Liability for Breach of Confidentiality</a:t>
             </a:r>
             <a:endParaRPr lang="en-US" dirty="0"/>
           </a:p>
@@ -9050,7 +9050,7 @@
             </a:pPr>
             <a:r>
               <a:rPr lang="en-US" b="1" dirty="0"/>
-              <a:t>Corporate Liability for Breach of Confidentiality</a:t>
+              <a:t>Securing Confidentiality through Certifying Authorities</a:t>
             </a:r>
             <a:endParaRPr lang="en-US" dirty="0"/>
           </a:p>
@@ -9061,7 +9061,7 @@
             </a:pPr>
             <a:r>
               <a:rPr lang="en-US" b="1" dirty="0"/>
-              <a:t>Securing Confidentiality through Certifying Authorities</a:t>
+              <a:t>Protected Systems &amp; Critical Infrastructure</a:t>
             </a:r>
             <a:endParaRPr lang="en-US" dirty="0"/>
           </a:p>
@@ -9071,30 +9071,12 @@
               <a:buChar char="•"/>
             </a:pPr>
             <a:r>
+              <a:rPr lang="en-US" b="1"/>
+              <a:t>Challenges </a:t>
+            </a:r>
+            <a:r>
               <a:rPr lang="en-US" b="1" dirty="0"/>
-              <a:t>Protected Systems &amp; Critical Infrastructure</a:t>
-            </a:r>
-            <a:endParaRPr lang="en-US" dirty="0"/>
-          </a:p>
-          <a:p>
-            <a:pPr marL="388620" indent="-342900">
-              <a:buFont typeface="Arial" panose="020B0604020202020204" pitchFamily="34" charset="0"/>
-              <a:buChar char="•"/>
-            </a:pPr>
-            <a:r>
-              <a:rPr lang="en-US" b="1" dirty="0"/>
-              <a:t>Comparative Analysis &amp; Jurisprudential Insights</a:t>
-            </a:r>
-            <a:endParaRPr lang="en-US" dirty="0"/>
-          </a:p>
-          <a:p>
-            <a:pPr marL="388620" indent="-342900">
-              <a:buFont typeface="Arial" panose="020B0604020202020204" pitchFamily="34" charset="0"/>
-              <a:buChar char="•"/>
-            </a:pPr>
-            <a:r>
-              <a:rPr lang="en-US" b="1" dirty="0"/>
-              <a:t>Challenges &amp; Recommendations</a:t>
+              <a:t>&amp; Recommendations</a:t>
             </a:r>
             <a:endParaRPr lang="en-US" dirty="0"/>
           </a:p>
